--- a/docs/commit/期末报告.pptx
+++ b/docs/commit/期末报告.pptx
@@ -261,7 +261,7 @@
   <p:extLst>
     <p:ext uri="{EFAFB233-063F-42B5-8137-9DF3F51BA10A}">
       <p15:sldGuideLst xmlns:p15="http://schemas.microsoft.com/office/powerpoint/2012/main">
-        <p15:guide id="1" orient="horz" pos="1626" userDrawn="1">
+        <p15:guide id="1" orient="horz" pos="1615" userDrawn="1">
           <p15:clr>
             <a:srgbClr val="747775"/>
           </p15:clr>
@@ -20585,8 +20585,8 @@
         </p:nvSpPr>
         <p:spPr>
           <a:xfrm>
-            <a:off x="3536239" y="3909427"/>
-            <a:ext cx="5119523" cy="1107996"/>
+            <a:off x="953135" y="3909695"/>
+            <a:ext cx="10046335" cy="1599565"/>
           </a:xfrm>
           <a:prstGeom prst="rect">
             <a:avLst/>
@@ -20611,6 +20611,66 @@
               <a:t>谢谢</a:t>
             </a:r>
             <a:endParaRPr lang="zh-CN" altLang="en-US" sz="6600" b="1" dirty="0">
+              <a:solidFill>
+                <a:srgbClr val="014924"/>
+              </a:solidFill>
+              <a:latin typeface="微软雅黑" panose="020B0503020204020204" pitchFamily="34" charset="-122"/>
+              <a:ea typeface="微软雅黑" panose="020B0503020204020204" pitchFamily="34" charset="-122"/>
+            </a:endParaRPr>
+          </a:p>
+          <a:p>
+            <a:pPr algn="ctr"/>
+            <a:endParaRPr lang="zh-CN" altLang="en-US" sz="1600" b="1" dirty="0">
+              <a:solidFill>
+                <a:srgbClr val="014924"/>
+              </a:solidFill>
+              <a:latin typeface="微软雅黑" panose="020B0503020204020204" pitchFamily="34" charset="-122"/>
+              <a:ea typeface="微软雅黑" panose="020B0503020204020204" pitchFamily="34" charset="-122"/>
+            </a:endParaRPr>
+          </a:p>
+          <a:p>
+            <a:pPr algn="ctr"/>
+            <a:r>
+              <a:rPr lang="zh-CN" altLang="en-US" sz="1600" b="1" dirty="0">
+                <a:solidFill>
+                  <a:srgbClr val="014924"/>
+                </a:solidFill>
+                <a:latin typeface="微软雅黑" panose="020B0503020204020204" pitchFamily="34" charset="-122"/>
+                <a:ea typeface="微软雅黑" panose="020B0503020204020204" pitchFamily="34" charset="-122"/>
+              </a:rPr>
+              <a:t>附</a:t>
+            </a:r>
+            <a:r>
+              <a:rPr lang="en-US" altLang="zh-CN" sz="1600" b="1" dirty="0">
+                <a:solidFill>
+                  <a:srgbClr val="014924"/>
+                </a:solidFill>
+                <a:latin typeface="微软雅黑" panose="020B0503020204020204" pitchFamily="34" charset="-122"/>
+                <a:ea typeface="微软雅黑" panose="020B0503020204020204" pitchFamily="34" charset="-122"/>
+              </a:rPr>
+              <a:t> </a:t>
+            </a:r>
+            <a:r>
+              <a:rPr lang="zh-CN" altLang="en-US" sz="1600" b="1" dirty="0">
+                <a:solidFill>
+                  <a:srgbClr val="014924"/>
+                </a:solidFill>
+                <a:latin typeface="微软雅黑" panose="020B0503020204020204" pitchFamily="34" charset="-122"/>
+                <a:ea typeface="微软雅黑" panose="020B0503020204020204" pitchFamily="34" charset="-122"/>
+              </a:rPr>
+              <a:t>项目仓库地址</a:t>
+            </a:r>
+            <a:r>
+              <a:rPr lang="en-US" altLang="zh-CN" sz="1600" b="1" dirty="0">
+                <a:solidFill>
+                  <a:srgbClr val="014924"/>
+                </a:solidFill>
+                <a:latin typeface="微软雅黑" panose="020B0503020204020204" pitchFamily="34" charset="-122"/>
+                <a:ea typeface="微软雅黑" panose="020B0503020204020204" pitchFamily="34" charset="-122"/>
+              </a:rPr>
+              <a:t>https://github.com/boyokkkkk/MLLM-FinalProject</a:t>
+            </a:r>
+            <a:endParaRPr lang="en-US" altLang="zh-CN" sz="1600" b="1" dirty="0">
               <a:solidFill>
                 <a:srgbClr val="014924"/>
               </a:solidFill>
